--- a/templates/static/content/comparison_purple_gradient.pptx
+++ b/templates/static/content/comparison_purple_gradient.pptx
@@ -4,6 +4,9 @@
   <p:sldMasterIdLst>
     <p:sldMasterId id="2147483648" r:id="rId1"/>
   </p:sldMasterIdLst>
+  <p:sldIdLst>
+    <p:sldId id="256" r:id="rId7"/>
+  </p:sldIdLst>
   <p:sldSz cx="9144000" cy="6858000" type="screen4x3"/>
   <p:notesSz cx="6858000" cy="9144000"/>
   <p:defaultTextStyle>
@@ -3073,6 +3076,1062 @@
     </p:otherStyle>
   </p:txStyles>
 </p:sldMaster>
+</file>
+
+<file path=ppt/slides/slide1.xml><?xml version="1.0" encoding="utf-8"?>
+<p:sld xmlns:a="http://schemas.openxmlformats.org/drawingml/2006/main" xmlns:p="http://schemas.openxmlformats.org/presentationml/2006/main" xmlns:r="http://schemas.openxmlformats.org/officeDocument/2006/relationships">
+  <p:cSld>
+    <p:spTree>
+      <p:nvGrpSpPr>
+        <p:cNvPr id="1" name=""/>
+        <p:cNvGrpSpPr/>
+        <p:nvPr/>
+      </p:nvGrpSpPr>
+      <p:grpSpPr/>
+      <p:sp>
+        <p:nvSpPr>
+          <p:cNvPr id="2" name="Rectangle 1"/>
+          <p:cNvSpPr/>
+          <p:nvPr/>
+        </p:nvSpPr>
+        <p:spPr>
+          <a:xfrm>
+            <a:off x="0" y="0"/>
+            <a:ext cx="9144000" cy="6858000"/>
+          </a:xfrm>
+          <a:prstGeom prst="rect">
+            <a:avLst/>
+          </a:prstGeom>
+          <a:solidFill>
+            <a:srgbClr val="FFFFFF"/>
+          </a:solidFill>
+          <a:ln>
+            <a:noFill/>
+          </a:ln>
+        </p:spPr>
+        <p:style>
+          <a:lnRef idx="1">
+            <a:schemeClr val="accent1"/>
+          </a:lnRef>
+          <a:fillRef idx="3">
+            <a:schemeClr val="accent1"/>
+          </a:fillRef>
+          <a:effectRef idx="2">
+            <a:schemeClr val="accent1"/>
+          </a:effectRef>
+          <a:fontRef idx="minor">
+            <a:schemeClr val="lt1"/>
+          </a:fontRef>
+        </p:style>
+        <p:txBody>
+          <a:bodyPr rtlCol="0" anchor="ctr"/>
+          <a:lstStyle/>
+          <a:p>
+            <a:pPr algn="ctr"/>
+          </a:p>
+        </p:txBody>
+      </p:sp>
+      <p:sp>
+        <p:nvSpPr>
+          <p:cNvPr id="3" name="TextBox 2"/>
+          <p:cNvSpPr txBox="1"/>
+          <p:nvPr/>
+        </p:nvSpPr>
+        <p:spPr>
+          <a:xfrm>
+            <a:off x="457200" y="274320"/>
+            <a:ext cx="8229600" cy="548640"/>
+          </a:xfrm>
+          <a:prstGeom prst="rect">
+            <a:avLst/>
+          </a:prstGeom>
+          <a:noFill/>
+        </p:spPr>
+        <p:txBody>
+          <a:bodyPr wrap="square">
+            <a:spAutoFit/>
+          </a:bodyPr>
+          <a:lstStyle/>
+          <a:p>
+            <a:pPr algn="ctr">
+              <a:defRPr sz="2800" b="1">
+                <a:solidFill>
+                  <a:srgbClr val="333333"/>
+                </a:solidFill>
+              </a:defRPr>
+            </a:pPr>
+            <a:r>
+              <a:t>方案对比</a:t>
+            </a:r>
+          </a:p>
+        </p:txBody>
+      </p:sp>
+      <p:sp>
+        <p:nvSpPr>
+          <p:cNvPr id="4" name="Rounded Rectangle 3"/>
+          <p:cNvSpPr/>
+          <p:nvPr/>
+        </p:nvSpPr>
+        <p:spPr>
+          <a:xfrm>
+            <a:off x="548640" y="1188720"/>
+            <a:ext cx="3474720" cy="4572000"/>
+          </a:xfrm>
+          <a:prstGeom prst="roundRect">
+            <a:avLst/>
+          </a:prstGeom>
+          <a:solidFill>
+            <a:srgbClr val="F5F8FF"/>
+          </a:solidFill>
+          <a:ln>
+            <a:noFill/>
+          </a:ln>
+        </p:spPr>
+        <p:style>
+          <a:lnRef idx="1">
+            <a:schemeClr val="accent1"/>
+          </a:lnRef>
+          <a:fillRef idx="3">
+            <a:schemeClr val="accent1"/>
+          </a:fillRef>
+          <a:effectRef idx="2">
+            <a:schemeClr val="accent1"/>
+          </a:effectRef>
+          <a:fontRef idx="minor">
+            <a:schemeClr val="lt1"/>
+          </a:fontRef>
+        </p:style>
+        <p:txBody>
+          <a:bodyPr rtlCol="0" anchor="ctr"/>
+          <a:lstStyle/>
+          <a:p>
+            <a:pPr algn="ctr"/>
+          </a:p>
+        </p:txBody>
+      </p:sp>
+      <p:sp>
+        <p:nvSpPr>
+          <p:cNvPr id="5" name="Rectangle 4"/>
+          <p:cNvSpPr/>
+          <p:nvPr/>
+        </p:nvSpPr>
+        <p:spPr>
+          <a:xfrm>
+            <a:off x="548640" y="1188720"/>
+            <a:ext cx="3474720" cy="54864"/>
+          </a:xfrm>
+          <a:prstGeom prst="rect">
+            <a:avLst/>
+          </a:prstGeom>
+          <a:solidFill>
+            <a:srgbClr val="1976D2"/>
+          </a:solidFill>
+          <a:ln>
+            <a:noFill/>
+          </a:ln>
+        </p:spPr>
+        <p:style>
+          <a:lnRef idx="1">
+            <a:schemeClr val="accent1"/>
+          </a:lnRef>
+          <a:fillRef idx="3">
+            <a:schemeClr val="accent1"/>
+          </a:fillRef>
+          <a:effectRef idx="2">
+            <a:schemeClr val="accent1"/>
+          </a:effectRef>
+          <a:fontRef idx="minor">
+            <a:schemeClr val="lt1"/>
+          </a:fontRef>
+        </p:style>
+        <p:txBody>
+          <a:bodyPr rtlCol="0" anchor="ctr"/>
+          <a:lstStyle/>
+          <a:p>
+            <a:pPr algn="ctr"/>
+          </a:p>
+        </p:txBody>
+      </p:sp>
+      <p:sp>
+        <p:nvSpPr>
+          <p:cNvPr id="6" name="TextBox 5"/>
+          <p:cNvSpPr txBox="1"/>
+          <p:nvPr/>
+        </p:nvSpPr>
+        <p:spPr>
+          <a:xfrm>
+            <a:off x="822960" y="1463040"/>
+            <a:ext cx="2926080" cy="457200"/>
+          </a:xfrm>
+          <a:prstGeom prst="rect">
+            <a:avLst/>
+          </a:prstGeom>
+          <a:noFill/>
+        </p:spPr>
+        <p:txBody>
+          <a:bodyPr wrap="square">
+            <a:spAutoFit/>
+          </a:bodyPr>
+          <a:lstStyle/>
+          <a:p>
+            <a:pPr algn="ctr">
+              <a:defRPr sz="2000" b="1">
+                <a:solidFill>
+                  <a:srgbClr val="1976D2"/>
+                </a:solidFill>
+              </a:defRPr>
+            </a:pPr>
+            <a:r>
+              <a:t>传统方式</a:t>
+            </a:r>
+          </a:p>
+        </p:txBody>
+      </p:sp>
+      <p:sp>
+        <p:nvSpPr>
+          <p:cNvPr id="7" name="Oval 6"/>
+          <p:cNvSpPr/>
+          <p:nvPr/>
+        </p:nvSpPr>
+        <p:spPr>
+          <a:xfrm>
+            <a:off x="822960" y="2240280"/>
+            <a:ext cx="164592" cy="164592"/>
+          </a:xfrm>
+          <a:prstGeom prst="ellipse">
+            <a:avLst/>
+          </a:prstGeom>
+          <a:solidFill>
+            <a:srgbClr val="1976D2"/>
+          </a:solidFill>
+          <a:ln>
+            <a:noFill/>
+          </a:ln>
+        </p:spPr>
+        <p:style>
+          <a:lnRef idx="1">
+            <a:schemeClr val="accent1"/>
+          </a:lnRef>
+          <a:fillRef idx="3">
+            <a:schemeClr val="accent1"/>
+          </a:fillRef>
+          <a:effectRef idx="2">
+            <a:schemeClr val="accent1"/>
+          </a:effectRef>
+          <a:fontRef idx="minor">
+            <a:schemeClr val="lt1"/>
+          </a:fontRef>
+        </p:style>
+        <p:txBody>
+          <a:bodyPr rtlCol="0" anchor="ctr"/>
+          <a:lstStyle/>
+          <a:p>
+            <a:pPr algn="ctr"/>
+          </a:p>
+        </p:txBody>
+      </p:sp>
+      <p:sp>
+        <p:nvSpPr>
+          <p:cNvPr id="8" name="TextBox 7"/>
+          <p:cNvSpPr txBox="1"/>
+          <p:nvPr/>
+        </p:nvSpPr>
+        <p:spPr>
+          <a:xfrm>
+            <a:off x="1097280" y="2194560"/>
+            <a:ext cx="2651760" cy="320040"/>
+          </a:xfrm>
+          <a:prstGeom prst="rect">
+            <a:avLst/>
+          </a:prstGeom>
+          <a:noFill/>
+        </p:spPr>
+        <p:txBody>
+          <a:bodyPr wrap="square">
+            <a:spAutoFit/>
+          </a:bodyPr>
+          <a:lstStyle/>
+          <a:p>
+            <a:pPr algn="l">
+              <a:defRPr sz="1200" b="0">
+                <a:solidFill>
+                  <a:srgbClr val="424242"/>
+                </a:solidFill>
+              </a:defRPr>
+            </a:pPr>
+            <a:r>
+              <a:t>依赖人工排版，耗时且易出错</a:t>
+            </a:r>
+          </a:p>
+        </p:txBody>
+      </p:sp>
+      <p:sp>
+        <p:nvSpPr>
+          <p:cNvPr id="9" name="Oval 8"/>
+          <p:cNvSpPr/>
+          <p:nvPr/>
+        </p:nvSpPr>
+        <p:spPr>
+          <a:xfrm>
+            <a:off x="822960" y="2880360"/>
+            <a:ext cx="164592" cy="164592"/>
+          </a:xfrm>
+          <a:prstGeom prst="ellipse">
+            <a:avLst/>
+          </a:prstGeom>
+          <a:solidFill>
+            <a:srgbClr val="1976D2"/>
+          </a:solidFill>
+          <a:ln>
+            <a:noFill/>
+          </a:ln>
+        </p:spPr>
+        <p:style>
+          <a:lnRef idx="1">
+            <a:schemeClr val="accent1"/>
+          </a:lnRef>
+          <a:fillRef idx="3">
+            <a:schemeClr val="accent1"/>
+          </a:fillRef>
+          <a:effectRef idx="2">
+            <a:schemeClr val="accent1"/>
+          </a:effectRef>
+          <a:fontRef idx="minor">
+            <a:schemeClr val="lt1"/>
+          </a:fontRef>
+        </p:style>
+        <p:txBody>
+          <a:bodyPr rtlCol="0" anchor="ctr"/>
+          <a:lstStyle/>
+          <a:p>
+            <a:pPr algn="ctr"/>
+          </a:p>
+        </p:txBody>
+      </p:sp>
+      <p:sp>
+        <p:nvSpPr>
+          <p:cNvPr id="10" name="TextBox 9"/>
+          <p:cNvSpPr txBox="1"/>
+          <p:nvPr/>
+        </p:nvSpPr>
+        <p:spPr>
+          <a:xfrm>
+            <a:off x="1097280" y="2834640"/>
+            <a:ext cx="2651760" cy="320040"/>
+          </a:xfrm>
+          <a:prstGeom prst="rect">
+            <a:avLst/>
+          </a:prstGeom>
+          <a:noFill/>
+        </p:spPr>
+        <p:txBody>
+          <a:bodyPr wrap="square">
+            <a:spAutoFit/>
+          </a:bodyPr>
+          <a:lstStyle/>
+          <a:p>
+            <a:pPr algn="l">
+              <a:defRPr sz="1200" b="0">
+                <a:solidFill>
+                  <a:srgbClr val="424242"/>
+                </a:solidFill>
+              </a:defRPr>
+            </a:pPr>
+            <a:r>
+              <a:t>多套文档风格难以统一</a:t>
+            </a:r>
+          </a:p>
+        </p:txBody>
+      </p:sp>
+      <p:sp>
+        <p:nvSpPr>
+          <p:cNvPr id="11" name="Oval 10"/>
+          <p:cNvSpPr/>
+          <p:nvPr/>
+        </p:nvSpPr>
+        <p:spPr>
+          <a:xfrm>
+            <a:off x="822960" y="3520440"/>
+            <a:ext cx="164592" cy="164592"/>
+          </a:xfrm>
+          <a:prstGeom prst="ellipse">
+            <a:avLst/>
+          </a:prstGeom>
+          <a:solidFill>
+            <a:srgbClr val="1976D2"/>
+          </a:solidFill>
+          <a:ln>
+            <a:noFill/>
+          </a:ln>
+        </p:spPr>
+        <p:style>
+          <a:lnRef idx="1">
+            <a:schemeClr val="accent1"/>
+          </a:lnRef>
+          <a:fillRef idx="3">
+            <a:schemeClr val="accent1"/>
+          </a:fillRef>
+          <a:effectRef idx="2">
+            <a:schemeClr val="accent1"/>
+          </a:effectRef>
+          <a:fontRef idx="minor">
+            <a:schemeClr val="lt1"/>
+          </a:fontRef>
+        </p:style>
+        <p:txBody>
+          <a:bodyPr rtlCol="0" anchor="ctr"/>
+          <a:lstStyle/>
+          <a:p>
+            <a:pPr algn="ctr"/>
+          </a:p>
+        </p:txBody>
+      </p:sp>
+      <p:sp>
+        <p:nvSpPr>
+          <p:cNvPr id="12" name="TextBox 11"/>
+          <p:cNvSpPr txBox="1"/>
+          <p:nvPr/>
+        </p:nvSpPr>
+        <p:spPr>
+          <a:xfrm>
+            <a:off x="1097280" y="3474720"/>
+            <a:ext cx="2651760" cy="320040"/>
+          </a:xfrm>
+          <a:prstGeom prst="rect">
+            <a:avLst/>
+          </a:prstGeom>
+          <a:noFill/>
+        </p:spPr>
+        <p:txBody>
+          <a:bodyPr wrap="square">
+            <a:spAutoFit/>
+          </a:bodyPr>
+          <a:lstStyle/>
+          <a:p>
+            <a:pPr algn="l">
+              <a:defRPr sz="1200" b="0">
+                <a:solidFill>
+                  <a:srgbClr val="424242"/>
+                </a:solidFill>
+              </a:defRPr>
+            </a:pPr>
+            <a:r>
+              <a:t>复用需要复制粘贴再修改</a:t>
+            </a:r>
+          </a:p>
+        </p:txBody>
+      </p:sp>
+      <p:sp>
+        <p:nvSpPr>
+          <p:cNvPr id="13" name="Rounded Rectangle 12"/>
+          <p:cNvSpPr/>
+          <p:nvPr/>
+        </p:nvSpPr>
+        <p:spPr>
+          <a:xfrm>
+            <a:off x="5120640" y="1188720"/>
+            <a:ext cx="3474720" cy="4572000"/>
+          </a:xfrm>
+          <a:prstGeom prst="roundRect">
+            <a:avLst/>
+          </a:prstGeom>
+          <a:solidFill>
+            <a:srgbClr val="FFF5F5"/>
+          </a:solidFill>
+          <a:ln>
+            <a:noFill/>
+          </a:ln>
+        </p:spPr>
+        <p:style>
+          <a:lnRef idx="1">
+            <a:schemeClr val="accent1"/>
+          </a:lnRef>
+          <a:fillRef idx="3">
+            <a:schemeClr val="accent1"/>
+          </a:fillRef>
+          <a:effectRef idx="2">
+            <a:schemeClr val="accent1"/>
+          </a:effectRef>
+          <a:fontRef idx="minor">
+            <a:schemeClr val="lt1"/>
+          </a:fontRef>
+        </p:style>
+        <p:txBody>
+          <a:bodyPr rtlCol="0" anchor="ctr"/>
+          <a:lstStyle/>
+          <a:p>
+            <a:pPr algn="ctr"/>
+          </a:p>
+        </p:txBody>
+      </p:sp>
+      <p:sp>
+        <p:nvSpPr>
+          <p:cNvPr id="14" name="Rectangle 13"/>
+          <p:cNvSpPr/>
+          <p:nvPr/>
+        </p:nvSpPr>
+        <p:spPr>
+          <a:xfrm>
+            <a:off x="5120640" y="1188720"/>
+            <a:ext cx="3474720" cy="54864"/>
+          </a:xfrm>
+          <a:prstGeom prst="rect">
+            <a:avLst/>
+          </a:prstGeom>
+          <a:solidFill>
+            <a:srgbClr val="E53935"/>
+          </a:solidFill>
+          <a:ln>
+            <a:noFill/>
+          </a:ln>
+        </p:spPr>
+        <p:style>
+          <a:lnRef idx="1">
+            <a:schemeClr val="accent1"/>
+          </a:lnRef>
+          <a:fillRef idx="3">
+            <a:schemeClr val="accent1"/>
+          </a:fillRef>
+          <a:effectRef idx="2">
+            <a:schemeClr val="accent1"/>
+          </a:effectRef>
+          <a:fontRef idx="minor">
+            <a:schemeClr val="lt1"/>
+          </a:fontRef>
+        </p:style>
+        <p:txBody>
+          <a:bodyPr rtlCol="0" anchor="ctr"/>
+          <a:lstStyle/>
+          <a:p>
+            <a:pPr algn="ctr"/>
+          </a:p>
+        </p:txBody>
+      </p:sp>
+      <p:sp>
+        <p:nvSpPr>
+          <p:cNvPr id="15" name="TextBox 14"/>
+          <p:cNvSpPr txBox="1"/>
+          <p:nvPr/>
+        </p:nvSpPr>
+        <p:spPr>
+          <a:xfrm>
+            <a:off x="5394960" y="1463040"/>
+            <a:ext cx="2926080" cy="457200"/>
+          </a:xfrm>
+          <a:prstGeom prst="rect">
+            <a:avLst/>
+          </a:prstGeom>
+          <a:noFill/>
+        </p:spPr>
+        <p:txBody>
+          <a:bodyPr wrap="square">
+            <a:spAutoFit/>
+          </a:bodyPr>
+          <a:lstStyle/>
+          <a:p>
+            <a:pPr algn="ctr">
+              <a:defRPr sz="2000" b="1">
+                <a:solidFill>
+                  <a:srgbClr val="E53935"/>
+                </a:solidFill>
+              </a:defRPr>
+            </a:pPr>
+            <a:r>
+              <a:t>本方案</a:t>
+            </a:r>
+          </a:p>
+        </p:txBody>
+      </p:sp>
+      <p:sp>
+        <p:nvSpPr>
+          <p:cNvPr id="16" name="Oval 15"/>
+          <p:cNvSpPr/>
+          <p:nvPr/>
+        </p:nvSpPr>
+        <p:spPr>
+          <a:xfrm>
+            <a:off x="5394960" y="2240280"/>
+            <a:ext cx="164592" cy="164592"/>
+          </a:xfrm>
+          <a:prstGeom prst="ellipse">
+            <a:avLst/>
+          </a:prstGeom>
+          <a:solidFill>
+            <a:srgbClr val="E53935"/>
+          </a:solidFill>
+          <a:ln>
+            <a:noFill/>
+          </a:ln>
+        </p:spPr>
+        <p:style>
+          <a:lnRef idx="1">
+            <a:schemeClr val="accent1"/>
+          </a:lnRef>
+          <a:fillRef idx="3">
+            <a:schemeClr val="accent1"/>
+          </a:fillRef>
+          <a:effectRef idx="2">
+            <a:schemeClr val="accent1"/>
+          </a:effectRef>
+          <a:fontRef idx="minor">
+            <a:schemeClr val="lt1"/>
+          </a:fontRef>
+        </p:style>
+        <p:txBody>
+          <a:bodyPr rtlCol="0" anchor="ctr"/>
+          <a:lstStyle/>
+          <a:p>
+            <a:pPr algn="ctr"/>
+          </a:p>
+        </p:txBody>
+      </p:sp>
+      <p:sp>
+        <p:nvSpPr>
+          <p:cNvPr id="17" name="TextBox 16"/>
+          <p:cNvSpPr txBox="1"/>
+          <p:nvPr/>
+        </p:nvSpPr>
+        <p:spPr>
+          <a:xfrm>
+            <a:off x="5669280" y="2194560"/>
+            <a:ext cx="2651760" cy="320040"/>
+          </a:xfrm>
+          <a:prstGeom prst="rect">
+            <a:avLst/>
+          </a:prstGeom>
+          <a:noFill/>
+        </p:spPr>
+        <p:txBody>
+          <a:bodyPr wrap="square">
+            <a:spAutoFit/>
+          </a:bodyPr>
+          <a:lstStyle/>
+          <a:p>
+            <a:pPr algn="l">
+              <a:defRPr sz="1200" b="0">
+                <a:solidFill>
+                  <a:srgbClr val="424242"/>
+                </a:solidFill>
+              </a:defRPr>
+            </a:pPr>
+            <a:r>
+              <a:t>脚本批量生成，分钟级交付</a:t>
+            </a:r>
+          </a:p>
+        </p:txBody>
+      </p:sp>
+      <p:sp>
+        <p:nvSpPr>
+          <p:cNvPr id="18" name="Oval 17"/>
+          <p:cNvSpPr/>
+          <p:nvPr/>
+        </p:nvSpPr>
+        <p:spPr>
+          <a:xfrm>
+            <a:off x="5394960" y="2880360"/>
+            <a:ext cx="164592" cy="164592"/>
+          </a:xfrm>
+          <a:prstGeom prst="ellipse">
+            <a:avLst/>
+          </a:prstGeom>
+          <a:solidFill>
+            <a:srgbClr val="E53935"/>
+          </a:solidFill>
+          <a:ln>
+            <a:noFill/>
+          </a:ln>
+        </p:spPr>
+        <p:style>
+          <a:lnRef idx="1">
+            <a:schemeClr val="accent1"/>
+          </a:lnRef>
+          <a:fillRef idx="3">
+            <a:schemeClr val="accent1"/>
+          </a:fillRef>
+          <a:effectRef idx="2">
+            <a:schemeClr val="accent1"/>
+          </a:effectRef>
+          <a:fontRef idx="minor">
+            <a:schemeClr val="lt1"/>
+          </a:fontRef>
+        </p:style>
+        <p:txBody>
+          <a:bodyPr rtlCol="0" anchor="ctr"/>
+          <a:lstStyle/>
+          <a:p>
+            <a:pPr algn="ctr"/>
+          </a:p>
+        </p:txBody>
+      </p:sp>
+      <p:sp>
+        <p:nvSpPr>
+          <p:cNvPr id="19" name="TextBox 18"/>
+          <p:cNvSpPr txBox="1"/>
+          <p:nvPr/>
+        </p:nvSpPr>
+        <p:spPr>
+          <a:xfrm>
+            <a:off x="5669280" y="2834640"/>
+            <a:ext cx="2651760" cy="320040"/>
+          </a:xfrm>
+          <a:prstGeom prst="rect">
+            <a:avLst/>
+          </a:prstGeom>
+          <a:noFill/>
+        </p:spPr>
+        <p:txBody>
+          <a:bodyPr wrap="square">
+            <a:spAutoFit/>
+          </a:bodyPr>
+          <a:lstStyle/>
+          <a:p>
+            <a:pPr algn="l">
+              <a:defRPr sz="1200" b="0">
+                <a:solidFill>
+                  <a:srgbClr val="424242"/>
+                </a:solidFill>
+              </a:defRPr>
+            </a:pPr>
+            <a:r>
+              <a:t>七套主题保证视觉一致</a:t>
+            </a:r>
+          </a:p>
+        </p:txBody>
+      </p:sp>
+      <p:sp>
+        <p:nvSpPr>
+          <p:cNvPr id="20" name="Oval 19"/>
+          <p:cNvSpPr/>
+          <p:nvPr/>
+        </p:nvSpPr>
+        <p:spPr>
+          <a:xfrm>
+            <a:off x="5394960" y="3520440"/>
+            <a:ext cx="164592" cy="164592"/>
+          </a:xfrm>
+          <a:prstGeom prst="ellipse">
+            <a:avLst/>
+          </a:prstGeom>
+          <a:solidFill>
+            <a:srgbClr val="E53935"/>
+          </a:solidFill>
+          <a:ln>
+            <a:noFill/>
+          </a:ln>
+        </p:spPr>
+        <p:style>
+          <a:lnRef idx="1">
+            <a:schemeClr val="accent1"/>
+          </a:lnRef>
+          <a:fillRef idx="3">
+            <a:schemeClr val="accent1"/>
+          </a:fillRef>
+          <a:effectRef idx="2">
+            <a:schemeClr val="accent1"/>
+          </a:effectRef>
+          <a:fontRef idx="minor">
+            <a:schemeClr val="lt1"/>
+          </a:fontRef>
+        </p:style>
+        <p:txBody>
+          <a:bodyPr rtlCol="0" anchor="ctr"/>
+          <a:lstStyle/>
+          <a:p>
+            <a:pPr algn="ctr"/>
+          </a:p>
+        </p:txBody>
+      </p:sp>
+      <p:sp>
+        <p:nvSpPr>
+          <p:cNvPr id="21" name="TextBox 20"/>
+          <p:cNvSpPr txBox="1"/>
+          <p:nvPr/>
+        </p:nvSpPr>
+        <p:spPr>
+          <a:xfrm>
+            <a:off x="5669280" y="3474720"/>
+            <a:ext cx="2651760" cy="320040"/>
+          </a:xfrm>
+          <a:prstGeom prst="rect">
+            <a:avLst/>
+          </a:prstGeom>
+          <a:noFill/>
+        </p:spPr>
+        <p:txBody>
+          <a:bodyPr wrap="square">
+            <a:spAutoFit/>
+          </a:bodyPr>
+          <a:lstStyle/>
+          <a:p>
+            <a:pPr algn="l">
+              <a:defRPr sz="1200" b="0">
+                <a:solidFill>
+                  <a:srgbClr val="424242"/>
+                </a:solidFill>
+              </a:defRPr>
+            </a:pPr>
+            <a:r>
+              <a:t>改参数即可整批重生成</a:t>
+            </a:r>
+          </a:p>
+        </p:txBody>
+      </p:sp>
+      <p:sp>
+        <p:nvSpPr>
+          <p:cNvPr id="22" name="Rectangle 21"/>
+          <p:cNvSpPr/>
+          <p:nvPr/>
+        </p:nvSpPr>
+        <p:spPr>
+          <a:xfrm>
+            <a:off x="4553712" y="1371600"/>
+            <a:ext cx="36576" cy="1645920"/>
+          </a:xfrm>
+          <a:prstGeom prst="rect">
+            <a:avLst/>
+          </a:prstGeom>
+          <a:solidFill>
+            <a:srgbClr val="E0E0E0"/>
+          </a:solidFill>
+          <a:ln>
+            <a:noFill/>
+          </a:ln>
+        </p:spPr>
+        <p:style>
+          <a:lnRef idx="1">
+            <a:schemeClr val="accent1"/>
+          </a:lnRef>
+          <a:fillRef idx="3">
+            <a:schemeClr val="accent1"/>
+          </a:fillRef>
+          <a:effectRef idx="2">
+            <a:schemeClr val="accent1"/>
+          </a:effectRef>
+          <a:fontRef idx="minor">
+            <a:schemeClr val="lt1"/>
+          </a:fontRef>
+        </p:style>
+        <p:txBody>
+          <a:bodyPr rtlCol="0" anchor="ctr"/>
+          <a:lstStyle/>
+          <a:p>
+            <a:pPr algn="ctr"/>
+          </a:p>
+        </p:txBody>
+      </p:sp>
+      <p:sp>
+        <p:nvSpPr>
+          <p:cNvPr id="23" name="Oval 22"/>
+          <p:cNvSpPr/>
+          <p:nvPr/>
+        </p:nvSpPr>
+        <p:spPr>
+          <a:xfrm>
+            <a:off x="4206240" y="3108960"/>
+            <a:ext cx="731520" cy="731520"/>
+          </a:xfrm>
+          <a:prstGeom prst="ellipse">
+            <a:avLst/>
+          </a:prstGeom>
+          <a:solidFill>
+            <a:srgbClr val="FF6F00"/>
+          </a:solidFill>
+          <a:ln>
+            <a:noFill/>
+          </a:ln>
+        </p:spPr>
+        <p:style>
+          <a:lnRef idx="1">
+            <a:schemeClr val="accent1"/>
+          </a:lnRef>
+          <a:fillRef idx="3">
+            <a:schemeClr val="accent1"/>
+          </a:fillRef>
+          <a:effectRef idx="2">
+            <a:schemeClr val="accent1"/>
+          </a:effectRef>
+          <a:fontRef idx="minor">
+            <a:schemeClr val="lt1"/>
+          </a:fontRef>
+        </p:style>
+        <p:txBody>
+          <a:bodyPr rtlCol="0" anchor="ctr"/>
+          <a:lstStyle/>
+          <a:p>
+            <a:pPr algn="ctr"/>
+          </a:p>
+        </p:txBody>
+      </p:sp>
+      <p:sp>
+        <p:nvSpPr>
+          <p:cNvPr id="24" name="TextBox 23"/>
+          <p:cNvSpPr txBox="1"/>
+          <p:nvPr/>
+        </p:nvSpPr>
+        <p:spPr>
+          <a:xfrm>
+            <a:off x="4206240" y="3310128"/>
+            <a:ext cx="731520" cy="731520"/>
+          </a:xfrm>
+          <a:prstGeom prst="rect">
+            <a:avLst/>
+          </a:prstGeom>
+          <a:noFill/>
+        </p:spPr>
+        <p:txBody>
+          <a:bodyPr wrap="square">
+            <a:spAutoFit/>
+          </a:bodyPr>
+          <a:lstStyle/>
+          <a:p>
+            <a:pPr algn="ctr">
+              <a:defRPr sz="2000" b="1">
+                <a:solidFill>
+                  <a:srgbClr val="FFFFFF"/>
+                </a:solidFill>
+              </a:defRPr>
+            </a:pPr>
+            <a:r>
+              <a:t>VS</a:t>
+            </a:r>
+          </a:p>
+        </p:txBody>
+      </p:sp>
+      <p:sp>
+        <p:nvSpPr>
+          <p:cNvPr id="25" name="Rectangle 24"/>
+          <p:cNvSpPr/>
+          <p:nvPr/>
+        </p:nvSpPr>
+        <p:spPr>
+          <a:xfrm>
+            <a:off x="4553712" y="3931920"/>
+            <a:ext cx="36576" cy="1645920"/>
+          </a:xfrm>
+          <a:prstGeom prst="rect">
+            <a:avLst/>
+          </a:prstGeom>
+          <a:solidFill>
+            <a:srgbClr val="E0E0E0"/>
+          </a:solidFill>
+          <a:ln>
+            <a:noFill/>
+          </a:ln>
+        </p:spPr>
+        <p:style>
+          <a:lnRef idx="1">
+            <a:schemeClr val="accent1"/>
+          </a:lnRef>
+          <a:fillRef idx="3">
+            <a:schemeClr val="accent1"/>
+          </a:fillRef>
+          <a:effectRef idx="2">
+            <a:schemeClr val="accent1"/>
+          </a:effectRef>
+          <a:fontRef idx="minor">
+            <a:schemeClr val="lt1"/>
+          </a:fontRef>
+        </p:style>
+        <p:txBody>
+          <a:bodyPr rtlCol="0" anchor="ctr"/>
+          <a:lstStyle/>
+          <a:p>
+            <a:pPr algn="ctr"/>
+          </a:p>
+        </p:txBody>
+      </p:sp>
+      <p:sp>
+        <p:nvSpPr>
+          <p:cNvPr id="26" name="Rectangle 25"/>
+          <p:cNvSpPr/>
+          <p:nvPr/>
+        </p:nvSpPr>
+        <p:spPr>
+          <a:xfrm>
+            <a:off x="0" y="6583680"/>
+            <a:ext cx="4572000" cy="274320"/>
+          </a:xfrm>
+          <a:prstGeom prst="rect">
+            <a:avLst/>
+          </a:prstGeom>
+          <a:solidFill>
+            <a:srgbClr val="1976D2"/>
+          </a:solidFill>
+          <a:ln>
+            <a:noFill/>
+          </a:ln>
+        </p:spPr>
+        <p:style>
+          <a:lnRef idx="1">
+            <a:schemeClr val="accent1"/>
+          </a:lnRef>
+          <a:fillRef idx="3">
+            <a:schemeClr val="accent1"/>
+          </a:fillRef>
+          <a:effectRef idx="2">
+            <a:schemeClr val="accent1"/>
+          </a:effectRef>
+          <a:fontRef idx="minor">
+            <a:schemeClr val="lt1"/>
+          </a:fontRef>
+        </p:style>
+        <p:txBody>
+          <a:bodyPr rtlCol="0" anchor="ctr"/>
+          <a:lstStyle/>
+          <a:p>
+            <a:pPr algn="ctr"/>
+          </a:p>
+        </p:txBody>
+      </p:sp>
+      <p:sp>
+        <p:nvSpPr>
+          <p:cNvPr id="27" name="Rectangle 26"/>
+          <p:cNvSpPr/>
+          <p:nvPr/>
+        </p:nvSpPr>
+        <p:spPr>
+          <a:xfrm>
+            <a:off x="4572000" y="6583680"/>
+            <a:ext cx="4572000" cy="274320"/>
+          </a:xfrm>
+          <a:prstGeom prst="rect">
+            <a:avLst/>
+          </a:prstGeom>
+          <a:solidFill>
+            <a:srgbClr val="E53935"/>
+          </a:solidFill>
+          <a:ln>
+            <a:noFill/>
+          </a:ln>
+        </p:spPr>
+        <p:style>
+          <a:lnRef idx="1">
+            <a:schemeClr val="accent1"/>
+          </a:lnRef>
+          <a:fillRef idx="3">
+            <a:schemeClr val="accent1"/>
+          </a:fillRef>
+          <a:effectRef idx="2">
+            <a:schemeClr val="accent1"/>
+          </a:effectRef>
+          <a:fontRef idx="minor">
+            <a:schemeClr val="lt1"/>
+          </a:fontRef>
+        </p:style>
+        <p:txBody>
+          <a:bodyPr rtlCol="0" anchor="ctr"/>
+          <a:lstStyle/>
+          <a:p>
+            <a:pPr algn="ctr"/>
+          </a:p>
+        </p:txBody>
+      </p:sp>
+    </p:spTree>
+  </p:cSld>
+  <p:clrMapOvr>
+    <a:masterClrMapping/>
+  </p:clrMapOvr>
+</p:sld>
 </file>
 
 <file path=ppt/theme/theme1.xml><?xml version="1.0" encoding="utf-8"?>

--- a/templates/static/content/comparison_purple_gradient.pptx
+++ b/templates/static/content/comparison_purple_gradient.pptx
@@ -3224,7 +3224,7 @@
             <a:avLst/>
           </a:prstGeom>
           <a:solidFill>
-            <a:srgbClr val="1976D2"/>
+            <a:srgbClr val="7B2FBE"/>
           </a:solidFill>
           <a:ln>
             <a:noFill/>
@@ -3277,7 +3277,7 @@
             <a:pPr algn="ctr">
               <a:defRPr sz="2000" b="1">
                 <a:solidFill>
-                  <a:srgbClr val="1976D2"/>
+                  <a:srgbClr val="7B2FBE"/>
                 </a:solidFill>
               </a:defRPr>
             </a:pPr>
@@ -3302,7 +3302,7 @@
             <a:avLst/>
           </a:prstGeom>
           <a:solidFill>
-            <a:srgbClr val="1976D2"/>
+            <a:srgbClr val="7B2FBE"/>
           </a:solidFill>
           <a:ln>
             <a:noFill/>
@@ -3380,7 +3380,7 @@
             <a:avLst/>
           </a:prstGeom>
           <a:solidFill>
-            <a:srgbClr val="1976D2"/>
+            <a:srgbClr val="7B2FBE"/>
           </a:solidFill>
           <a:ln>
             <a:noFill/>
@@ -3458,7 +3458,7 @@
             <a:avLst/>
           </a:prstGeom>
           <a:solidFill>
-            <a:srgbClr val="1976D2"/>
+            <a:srgbClr val="7B2FBE"/>
           </a:solidFill>
           <a:ln>
             <a:noFill/>
@@ -3579,7 +3579,7 @@
             <a:avLst/>
           </a:prstGeom>
           <a:solidFill>
-            <a:srgbClr val="E53935"/>
+            <a:srgbClr val="E040FB"/>
           </a:solidFill>
           <a:ln>
             <a:noFill/>
@@ -3632,7 +3632,7 @@
             <a:pPr algn="ctr">
               <a:defRPr sz="2000" b="1">
                 <a:solidFill>
-                  <a:srgbClr val="E53935"/>
+                  <a:srgbClr val="E040FB"/>
                 </a:solidFill>
               </a:defRPr>
             </a:pPr>
@@ -3657,7 +3657,7 @@
             <a:avLst/>
           </a:prstGeom>
           <a:solidFill>
-            <a:srgbClr val="E53935"/>
+            <a:srgbClr val="E040FB"/>
           </a:solidFill>
           <a:ln>
             <a:noFill/>
@@ -3735,7 +3735,7 @@
             <a:avLst/>
           </a:prstGeom>
           <a:solidFill>
-            <a:srgbClr val="E53935"/>
+            <a:srgbClr val="E040FB"/>
           </a:solidFill>
           <a:ln>
             <a:noFill/>
@@ -3813,7 +3813,7 @@
             <a:avLst/>
           </a:prstGeom>
           <a:solidFill>
-            <a:srgbClr val="E53935"/>
+            <a:srgbClr val="E040FB"/>
           </a:solidFill>
           <a:ln>
             <a:noFill/>
@@ -3934,7 +3934,7 @@
             <a:avLst/>
           </a:prstGeom>
           <a:solidFill>
-            <a:srgbClr val="FF6F00"/>
+            <a:srgbClr val="A882FF"/>
           </a:solidFill>
           <a:ln>
             <a:noFill/>
@@ -4055,7 +4055,7 @@
             <a:avLst/>
           </a:prstGeom>
           <a:solidFill>
-            <a:srgbClr val="1976D2"/>
+            <a:srgbClr val="7B2FBE"/>
           </a:solidFill>
           <a:ln>
             <a:noFill/>
@@ -4098,7 +4098,7 @@
             <a:avLst/>
           </a:prstGeom>
           <a:solidFill>
-            <a:srgbClr val="E53935"/>
+            <a:srgbClr val="E040FB"/>
           </a:solidFill>
           <a:ln>
             <a:noFill/>
